--- a/data/09_internal_training/training_11.pptx
+++ b/data/09_internal_training/training_11.pptx
@@ -3140,24 +3140,7 @@
           <a:p/>
           <a:p>
             <a:r>
-              <a:t>华辰资本旗下的 HC AI Innovation Fund 在最近的资产配置会议中</a:t>
-            </a:r>
-          </a:p>
-          <a:p>
-            <a:r>
-              <a:t>讨论了 人工智能 行业的投资机会，并对 迪摩科技有限公司</a:t>
-            </a:r>
-          </a:p>
-          <a:p>
-            <a:r>
-              <a:t>进行了重点评估。</a:t>
-            </a:r>
-          </a:p>
-          <a:p/>
-          <a:p/>
-          <a:p>
-            <a:r>
-              <a:t>风险管理部认为，医疗科技 行业仍然面临若干</a:t>
+              <a:t>风险管理部认为，人工智能 行业仍然面临若干</a:t>
             </a:r>
           </a:p>
           <a:p>
@@ -3174,17 +3157,39 @@
           <a:p/>
           <a:p>
             <a:r>
-              <a:t>从产业链角度看，半导体 行业主要由上游设备厂商、</a:t>
-            </a:r>
-          </a:p>
-          <a:p>
-            <a:r>
-              <a:t>中游平台企业以及下游应用厂商组成。</a:t>
-            </a:r>
-          </a:p>
-          <a:p>
-            <a:r>
-              <a:t>万迅电脑网络有限公司 主要位于产业链的 下游 环节。</a:t>
+              <a:t>风险管理部认为，人工智能 行业仍然面临若干</a:t>
+            </a:r>
+          </a:p>
+          <a:p>
+            <a:r>
+              <a:t>不确定性因素，包括技术迭代风险、政策变化、</a:t>
+            </a:r>
+          </a:p>
+          <a:p>
+            <a:r>
+              <a:t>以及市场竞争加剧等问题。</a:t>
+            </a:r>
+          </a:p>
+          <a:p/>
+          <a:p/>
+          <a:p>
+            <a:r>
+              <a:t>飞海科技传媒有限公司 是中国 消费科技 行业的重要企业之一。</a:t>
+            </a:r>
+          </a:p>
+          <a:p>
+            <a:r>
+              <a:t>根据华辰资本 资产配置委员会 的研究，该公司成立于 2016 年，</a:t>
+            </a:r>
+          </a:p>
+          <a:p>
+            <a:r>
+              <a:t>目前员工规模约 2007 人。公司近年来持续加大研发投入，</a:t>
+            </a:r>
+          </a:p>
+          <a:p>
+            <a:r>
+              <a:t>在核心技术方面形成了较强的竞争壁垒。</a:t>
             </a:r>
           </a:p>
           <a:p/>
@@ -3246,17 +3251,34 @@
           <a:p/>
           <a:p>
             <a:r>
-              <a:t>华辰资本旗下的 HC Alpha Growth Fund 在最近的资产配置会议中</a:t>
-            </a:r>
-          </a:p>
-          <a:p>
-            <a:r>
-              <a:t>讨论了 云计算 行业的投资机会，并对 精芯科技有限公司</a:t>
-            </a:r>
-          </a:p>
-          <a:p>
-            <a:r>
-              <a:t>进行了重点评估。</a:t>
+              <a:t>根据内部财务模型测算，艾提科信科技有限公司 在未来三年</a:t>
+            </a:r>
+          </a:p>
+          <a:p>
+            <a:r>
+              <a:t>收入复合增长率预计可达到 34% 左右。</a:t>
+            </a:r>
+          </a:p>
+          <a:p>
+            <a:r>
+              <a:t>该预测基于行业需求增长以及公司产能扩张计划。</a:t>
+            </a:r>
+          </a:p>
+          <a:p/>
+          <a:p/>
+          <a:p>
+            <a:r>
+              <a:t>根据内部财务模型测算，信诚致远科技有限公司 在未来三年</a:t>
+            </a:r>
+          </a:p>
+          <a:p>
+            <a:r>
+              <a:t>收入复合增长率预计可达到 22% 左右。</a:t>
+            </a:r>
+          </a:p>
+          <a:p>
+            <a:r>
+              <a:t>该预测基于行业需求增长以及公司产能扩张计划。</a:t>
             </a:r>
           </a:p>
           <a:p/>
@@ -3264,23 +3286,6 @@
           <a:p>
             <a:r>
               <a:t>风险管理部认为，半导体 行业仍然面临若干</a:t>
-            </a:r>
-          </a:p>
-          <a:p>
-            <a:r>
-              <a:t>不确定性因素，包括技术迭代风险、政策变化、</a:t>
-            </a:r>
-          </a:p>
-          <a:p>
-            <a:r>
-              <a:t>以及市场竞争加剧等问题。</a:t>
-            </a:r>
-          </a:p>
-          <a:p/>
-          <a:p/>
-          <a:p>
-            <a:r>
-              <a:t>风险管理部认为，新能源 行业仍然面临若干</a:t>
             </a:r>
           </a:p>
           <a:p>
@@ -3352,61 +3357,51 @@
           <a:p/>
           <a:p>
             <a:r>
-              <a:t>根据内部财务模型测算，和泰科技有限公司 在未来三年</a:t>
-            </a:r>
-          </a:p>
-          <a:p>
-            <a:r>
-              <a:t>收入复合增长率预计可达到 33% 左右。</a:t>
-            </a:r>
-          </a:p>
-          <a:p>
-            <a:r>
-              <a:t>该预测基于行业需求增长以及公司产能扩张计划。</a:t>
-            </a:r>
-          </a:p>
-          <a:p/>
-          <a:p/>
-          <a:p>
-            <a:r>
-              <a:t>雨林木风计算机网络有限公司 是中国 医疗科技 行业的重要企业之一。</a:t>
-            </a:r>
-          </a:p>
-          <a:p>
-            <a:r>
-              <a:t>根据华辰资本 投资策略部 的研究，该公司成立于 2012 年，</a:t>
-            </a:r>
-          </a:p>
-          <a:p>
-            <a:r>
-              <a:t>目前员工规模约 1948 人。公司近年来持续加大研发投入，</a:t>
-            </a:r>
-          </a:p>
-          <a:p>
-            <a:r>
-              <a:t>在核心技术方面形成了较强的竞争壁垒。</a:t>
-            </a:r>
-          </a:p>
-          <a:p/>
-          <a:p/>
-          <a:p>
-            <a:r>
-              <a:t>和泰科技有限公司 是中国 人工智能 行业的重要企业之一。</a:t>
-            </a:r>
-          </a:p>
-          <a:p>
-            <a:r>
-              <a:t>根据华辰资本 风险管理部 的研究，该公司成立于 2008 年，</a:t>
-            </a:r>
-          </a:p>
-          <a:p>
-            <a:r>
-              <a:t>目前员工规模约 6443 人。公司近年来持续加大研发投入，</a:t>
-            </a:r>
-          </a:p>
-          <a:p>
-            <a:r>
-              <a:t>在核心技术方面形成了较强的竞争壁垒。</a:t>
+              <a:t>华辰资本旗下的 HC Quant Arbitrage Fund 在最近的资产配置会议中</a:t>
+            </a:r>
+          </a:p>
+          <a:p>
+            <a:r>
+              <a:t>讨论了 医疗科技 行业的投资机会，并对 迪摩信息有限公司</a:t>
+            </a:r>
+          </a:p>
+          <a:p>
+            <a:r>
+              <a:t>进行了重点评估。</a:t>
+            </a:r>
+          </a:p>
+          <a:p/>
+          <a:p/>
+          <a:p>
+            <a:r>
+              <a:t>从产业链角度看，人工智能 行业主要由上游设备厂商、</a:t>
+            </a:r>
+          </a:p>
+          <a:p>
+            <a:r>
+              <a:t>中游平台企业以及下游应用厂商组成。</a:t>
+            </a:r>
+          </a:p>
+          <a:p>
+            <a:r>
+              <a:t>华成育卓传媒有限公司 主要位于产业链的 中游 环节。</a:t>
+            </a:r>
+          </a:p>
+          <a:p/>
+          <a:p/>
+          <a:p>
+            <a:r>
+              <a:t>风险管理部认为，云计算 行业仍然面临若干</a:t>
+            </a:r>
+          </a:p>
+          <a:p>
+            <a:r>
+              <a:t>不确定性因素，包括技术迭代风险、政策变化、</a:t>
+            </a:r>
+          </a:p>
+          <a:p>
+            <a:r>
+              <a:t>以及市场竞争加剧等问题。</a:t>
             </a:r>
           </a:p>
           <a:p/>
@@ -3468,56 +3463,51 @@
           <a:p/>
           <a:p>
             <a:r>
-              <a:t>快讯网络有限公司 是中国 新能源 行业的重要企业之一。</a:t>
-            </a:r>
-          </a:p>
-          <a:p>
-            <a:r>
-              <a:t>根据华辰资本 资产配置委员会 的研究，该公司成立于 2016 年，</a:t>
-            </a:r>
-          </a:p>
-          <a:p>
-            <a:r>
-              <a:t>目前员工规模约 3433 人。公司近年来持续加大研发投入，</a:t>
-            </a:r>
-          </a:p>
-          <a:p>
-            <a:r>
-              <a:t>在核心技术方面形成了较强的竞争壁垒。</a:t>
-            </a:r>
-          </a:p>
-          <a:p/>
-          <a:p/>
-          <a:p>
-            <a:r>
-              <a:t>风险管理部认为，医疗科技 行业仍然面临若干</a:t>
-            </a:r>
-          </a:p>
-          <a:p>
-            <a:r>
-              <a:t>不确定性因素，包括技术迭代风险、政策变化、</a:t>
-            </a:r>
-          </a:p>
-          <a:p>
-            <a:r>
-              <a:t>以及市场竞争加剧等问题。</a:t>
-            </a:r>
-          </a:p>
-          <a:p/>
-          <a:p/>
-          <a:p>
-            <a:r>
-              <a:t>创亿信息有限公司 是中国 医疗科技 行业的重要企业之一。</a:t>
-            </a:r>
-          </a:p>
-          <a:p>
-            <a:r>
-              <a:t>根据华辰资本 投资策略部 的研究，该公司成立于 2007 年，</a:t>
-            </a:r>
-          </a:p>
-          <a:p>
-            <a:r>
-              <a:t>目前员工规模约 7601 人。公司近年来持续加大研发投入，</a:t>
+              <a:t>根据内部财务模型测算，昊嘉科技有限公司 在未来三年</a:t>
+            </a:r>
+          </a:p>
+          <a:p>
+            <a:r>
+              <a:t>收入复合增长率预计可达到 22% 左右。</a:t>
+            </a:r>
+          </a:p>
+          <a:p>
+            <a:r>
+              <a:t>该预测基于行业需求增长以及公司产能扩张计划。</a:t>
+            </a:r>
+          </a:p>
+          <a:p/>
+          <a:p/>
+          <a:p>
+            <a:r>
+              <a:t>根据内部财务模型测算，联软科技有限公司 在未来三年</a:t>
+            </a:r>
+          </a:p>
+          <a:p>
+            <a:r>
+              <a:t>收入复合增长率预计可达到 17% 左右。</a:t>
+            </a:r>
+          </a:p>
+          <a:p>
+            <a:r>
+              <a:t>该预测基于行业需求增长以及公司产能扩张计划。</a:t>
+            </a:r>
+          </a:p>
+          <a:p/>
+          <a:p/>
+          <a:p>
+            <a:r>
+              <a:t>信诚致远科技有限公司 是中国 云计算 行业的重要企业之一。</a:t>
+            </a:r>
+          </a:p>
+          <a:p>
+            <a:r>
+              <a:t>根据华辰资本 投资委员会 的研究，该公司成立于 2014 年，</a:t>
+            </a:r>
+          </a:p>
+          <a:p>
+            <a:r>
+              <a:t>目前员工规模约 1360 人。公司近年来持续加大研发投入，</a:t>
             </a:r>
           </a:p>
           <a:p>
@@ -3584,17 +3574,17 @@
           <a:p/>
           <a:p>
             <a:r>
-              <a:t>风险管理部认为，新能源 行业仍然面临若干</a:t>
-            </a:r>
-          </a:p>
-          <a:p>
-            <a:r>
-              <a:t>不确定性因素，包括技术迭代风险、政策变化、</a:t>
-            </a:r>
-          </a:p>
-          <a:p>
-            <a:r>
-              <a:t>以及市场竞争加剧等问题。</a:t>
+              <a:t>华辰资本旗下的 HC Global Macro Fund 在最近的资产配置会议中</a:t>
+            </a:r>
+          </a:p>
+          <a:p>
+            <a:r>
+              <a:t>讨论了 人工智能 行业的投资机会，并对 华成育卓传媒有限公司</a:t>
+            </a:r>
+          </a:p>
+          <a:p>
+            <a:r>
+              <a:t>进行了重点评估。</a:t>
             </a:r>
           </a:p>
           <a:p/>
@@ -3611,24 +3601,24 @@
           </a:p>
           <a:p>
             <a:r>
-              <a:t>昊嘉网络有限公司 主要位于产业链的 下游 环节。</a:t>
-            </a:r>
-          </a:p>
-          <a:p/>
-          <a:p/>
-          <a:p>
-            <a:r>
-              <a:t>华辰资本旗下的 HC AI Innovation Fund 在最近的资产配置会议中</a:t>
-            </a:r>
-          </a:p>
-          <a:p>
-            <a:r>
-              <a:t>讨论了 机器人 行业的投资机会，并对 新宇龙信息传媒有限公司</a:t>
-            </a:r>
-          </a:p>
-          <a:p>
-            <a:r>
-              <a:t>进行了重点评估。</a:t>
+              <a:t>富罳网络有限公司 主要位于产业链的 中游 环节。</a:t>
+            </a:r>
+          </a:p>
+          <a:p/>
+          <a:p/>
+          <a:p>
+            <a:r>
+              <a:t>从产业链角度看，消费科技 行业主要由上游设备厂商、</a:t>
+            </a:r>
+          </a:p>
+          <a:p>
+            <a:r>
+              <a:t>中游平台企业以及下游应用厂商组成。</a:t>
+            </a:r>
+          </a:p>
+          <a:p>
+            <a:r>
+              <a:t>昂歌信息信息有限公司 主要位于产业链的 中游 环节。</a:t>
             </a:r>
           </a:p>
           <a:p/>
@@ -3690,7 +3680,24 @@
           <a:p/>
           <a:p>
             <a:r>
-              <a:t>从产业链角度看，人工智能 行业主要由上游设备厂商、</a:t>
+              <a:t>风险管理部认为，新能源 行业仍然面临若干</a:t>
+            </a:r>
+          </a:p>
+          <a:p>
+            <a:r>
+              <a:t>不确定性因素，包括技术迭代风险、政策变化、</a:t>
+            </a:r>
+          </a:p>
+          <a:p>
+            <a:r>
+              <a:t>以及市场竞争加剧等问题。</a:t>
+            </a:r>
+          </a:p>
+          <a:p/>
+          <a:p/>
+          <a:p>
+            <a:r>
+              <a:t>从产业链角度看，医疗科技 行业主要由上游设备厂商、</a:t>
             </a:r>
           </a:p>
           <a:p>
@@ -3700,46 +3707,24 @@
           </a:p>
           <a:p>
             <a:r>
-              <a:t>雨林木风计算机科技有限公司 主要位于产业链的 中游 环节。</a:t>
-            </a:r>
-          </a:p>
-          <a:p/>
-          <a:p/>
-          <a:p>
-            <a:r>
-              <a:t>华辰资本旗下的 HC AI Innovation Fund 在最近的资产配置会议中</a:t>
-            </a:r>
-          </a:p>
-          <a:p>
-            <a:r>
-              <a:t>讨论了 云计算 行业的投资机会，并对 精芯科技有限公司</a:t>
-            </a:r>
-          </a:p>
-          <a:p>
-            <a:r>
-              <a:t>进行了重点评估。</a:t>
-            </a:r>
-          </a:p>
-          <a:p/>
-          <a:p/>
-          <a:p>
-            <a:r>
-              <a:t>东方峻景传媒有限公司 是中国 新能源 行业的重要企业之一。</a:t>
-            </a:r>
-          </a:p>
-          <a:p>
-            <a:r>
-              <a:t>根据华辰资本 资产配置委员会 的研究，该公司成立于 2013 年，</a:t>
-            </a:r>
-          </a:p>
-          <a:p>
-            <a:r>
-              <a:t>目前员工规模约 6208 人。公司近年来持续加大研发投入，</a:t>
-            </a:r>
-          </a:p>
-          <a:p>
-            <a:r>
-              <a:t>在核心技术方面形成了较强的竞争壁垒。</a:t>
+              <a:t>华成育卓科技有限公司 主要位于产业链的 中游 环节。</a:t>
+            </a:r>
+          </a:p>
+          <a:p/>
+          <a:p/>
+          <a:p>
+            <a:r>
+              <a:t>风险管理部认为，半导体 行业仍然面临若干</a:t>
+            </a:r>
+          </a:p>
+          <a:p>
+            <a:r>
+              <a:t>不确定性因素，包括技术迭代风险、政策变化、</a:t>
+            </a:r>
+          </a:p>
+          <a:p>
+            <a:r>
+              <a:t>以及市场竞争加剧等问题。</a:t>
             </a:r>
           </a:p>
           <a:p/>
@@ -3801,7 +3786,24 @@
           <a:p/>
           <a:p>
             <a:r>
-              <a:t>从产业链角度看，人工智能 行业主要由上游设备厂商、</a:t>
+              <a:t>华辰资本旗下的 HC AI Innovation Fund 在最近的资产配置会议中</a:t>
+            </a:r>
+          </a:p>
+          <a:p>
+            <a:r>
+              <a:t>讨论了 云计算 行业的投资机会，并对 信诚致远科技有限公司</a:t>
+            </a:r>
+          </a:p>
+          <a:p>
+            <a:r>
+              <a:t>进行了重点评估。</a:t>
+            </a:r>
+          </a:p>
+          <a:p/>
+          <a:p/>
+          <a:p>
+            <a:r>
+              <a:t>从产业链角度看，云计算 行业主要由上游设备厂商、</a:t>
             </a:r>
           </a:p>
           <a:p>
@@ -3811,41 +3813,29 @@
           </a:p>
           <a:p>
             <a:r>
-              <a:t>和泰科技有限公司 主要位于产业链的 上游 环节。</a:t>
-            </a:r>
-          </a:p>
-          <a:p/>
-          <a:p/>
-          <a:p>
-            <a:r>
-              <a:t>从产业链角度看，消费科技 行业主要由上游设备厂商、</a:t>
-            </a:r>
-          </a:p>
-          <a:p>
-            <a:r>
-              <a:t>中游平台企业以及下游应用厂商组成。</a:t>
-            </a:r>
-          </a:p>
-          <a:p>
-            <a:r>
-              <a:t>和泰传媒有限公司 主要位于产业链的 上游 环节。</a:t>
-            </a:r>
-          </a:p>
-          <a:p/>
-          <a:p/>
-          <a:p>
-            <a:r>
-              <a:t>风险管理部认为，消费科技 行业仍然面临若干</a:t>
-            </a:r>
-          </a:p>
-          <a:p>
-            <a:r>
-              <a:t>不确定性因素，包括技术迭代风险、政策变化、</a:t>
-            </a:r>
-          </a:p>
-          <a:p>
-            <a:r>
-              <a:t>以及市场竞争加剧等问题。</a:t>
+              <a:t>佳禾传媒有限公司 主要位于产业链的 下游 环节。</a:t>
+            </a:r>
+          </a:p>
+          <a:p/>
+          <a:p/>
+          <a:p>
+            <a:r>
+              <a:t>华成育卓科技有限公司 是中国 医疗科技 行业的重要企业之一。</a:t>
+            </a:r>
+          </a:p>
+          <a:p>
+            <a:r>
+              <a:t>根据华辰资本 风险管理部 的研究，该公司成立于 2020 年，</a:t>
+            </a:r>
+          </a:p>
+          <a:p>
+            <a:r>
+              <a:t>目前员工规模约 650 人。公司近年来持续加大研发投入，</a:t>
+            </a:r>
+          </a:p>
+          <a:p>
+            <a:r>
+              <a:t>在核心技术方面形成了较强的竞争壁垒。</a:t>
             </a:r>
           </a:p>
           <a:p/>
@@ -3907,51 +3897,51 @@
           <a:p/>
           <a:p>
             <a:r>
+              <a:t>风险管理部认为，人工智能 行业仍然面临若干</a:t>
+            </a:r>
+          </a:p>
+          <a:p>
+            <a:r>
+              <a:t>不确定性因素，包括技术迭代风险、政策变化、</a:t>
+            </a:r>
+          </a:p>
+          <a:p>
+            <a:r>
+              <a:t>以及市场竞争加剧等问题。</a:t>
+            </a:r>
+          </a:p>
+          <a:p/>
+          <a:p/>
+          <a:p>
+            <a:r>
+              <a:t>华辰资本旗下的 HC Global Macro Fund 在最近的资产配置会议中</a:t>
+            </a:r>
+          </a:p>
+          <a:p>
+            <a:r>
+              <a:t>讨论了 机器人 行业的投资机会，并对 通际名联网络有限公司</a:t>
+            </a:r>
+          </a:p>
+          <a:p>
+            <a:r>
+              <a:t>进行了重点评估。</a:t>
+            </a:r>
+          </a:p>
+          <a:p/>
+          <a:p/>
+          <a:p>
+            <a:r>
               <a:t>华辰资本旗下的 HC Alpha Growth Fund 在最近的资产配置会议中</a:t>
             </a:r>
           </a:p>
           <a:p>
             <a:r>
-              <a:t>讨论了 机器人 行业的投资机会，并对 新宇龙信息传媒有限公司</a:t>
+              <a:t>讨论了 医疗科技 行业的投资机会，并对 迪摩信息有限公司</a:t>
             </a:r>
           </a:p>
           <a:p>
             <a:r>
               <a:t>进行了重点评估。</a:t>
-            </a:r>
-          </a:p>
-          <a:p/>
-          <a:p/>
-          <a:p>
-            <a:r>
-              <a:t>华辰资本旗下的 HC Energy Transition Fund 在最近的资产配置会议中</a:t>
-            </a:r>
-          </a:p>
-          <a:p>
-            <a:r>
-              <a:t>讨论了 新能源 行业的投资机会，并对 昊嘉网络有限公司</a:t>
-            </a:r>
-          </a:p>
-          <a:p>
-            <a:r>
-              <a:t>进行了重点评估。</a:t>
-            </a:r>
-          </a:p>
-          <a:p/>
-          <a:p/>
-          <a:p>
-            <a:r>
-              <a:t>根据内部财务模型测算，东方峻景网络有限公司 在未来三年</a:t>
-            </a:r>
-          </a:p>
-          <a:p>
-            <a:r>
-              <a:t>收入复合增长率预计可达到 33% 左右。</a:t>
-            </a:r>
-          </a:p>
-          <a:p>
-            <a:r>
-              <a:t>该预测基于行业需求增长以及公司产能扩张计划。</a:t>
             </a:r>
           </a:p>
           <a:p/>
@@ -4013,46 +4003,51 @@
           <a:p/>
           <a:p>
             <a:r>
-              <a:t>风险管理部认为，人工智能 行业仍然面临若干</a:t>
-            </a:r>
-          </a:p>
-          <a:p>
-            <a:r>
-              <a:t>不确定性因素，包括技术迭代风险、政策变化、</a:t>
-            </a:r>
-          </a:p>
-          <a:p>
-            <a:r>
-              <a:t>以及市场竞争加剧等问题。</a:t>
-            </a:r>
-          </a:p>
-          <a:p/>
-          <a:p/>
-          <a:p>
-            <a:r>
-              <a:t>根据内部财务模型测算，雨林木风计算机科技有限公司 在未来三年</a:t>
-            </a:r>
-          </a:p>
-          <a:p>
-            <a:r>
-              <a:t>收入复合增长率预计可达到 29% 左右。</a:t>
-            </a:r>
-          </a:p>
-          <a:p>
-            <a:r>
-              <a:t>该预测基于行业需求增长以及公司产能扩张计划。</a:t>
-            </a:r>
-          </a:p>
-          <a:p/>
-          <a:p/>
-          <a:p>
-            <a:r>
-              <a:t>根据内部财务模型测算，九方信息有限公司 在未来三年</a:t>
-            </a:r>
-          </a:p>
-          <a:p>
-            <a:r>
-              <a:t>收入复合增长率预计可达到 19% 左右。</a:t>
+              <a:t>华辰资本旗下的 HC Global Macro Fund 在最近的资产配置会议中</a:t>
+            </a:r>
+          </a:p>
+          <a:p>
+            <a:r>
+              <a:t>讨论了 人工智能 行业的投资机会，并对 通际名联科技有限公司</a:t>
+            </a:r>
+          </a:p>
+          <a:p>
+            <a:r>
+              <a:t>进行了重点评估。</a:t>
+            </a:r>
+          </a:p>
+          <a:p/>
+          <a:p/>
+          <a:p>
+            <a:r>
+              <a:t>创联世纪信息有限公司 是中国 云计算 行业的重要企业之一。</a:t>
+            </a:r>
+          </a:p>
+          <a:p>
+            <a:r>
+              <a:t>根据华辰资本 投资委员会 的研究，该公司成立于 2005 年，</a:t>
+            </a:r>
+          </a:p>
+          <a:p>
+            <a:r>
+              <a:t>目前员工规模约 3637 人。公司近年来持续加大研发投入，</a:t>
+            </a:r>
+          </a:p>
+          <a:p>
+            <a:r>
+              <a:t>在核心技术方面形成了较强的竞争壁垒。</a:t>
+            </a:r>
+          </a:p>
+          <a:p/>
+          <a:p/>
+          <a:p>
+            <a:r>
+              <a:t>根据内部财务模型测算，华泰通安传媒有限公司 在未来三年</a:t>
+            </a:r>
+          </a:p>
+          <a:p>
+            <a:r>
+              <a:t>收入复合增长率预计可达到 35% 左右。</a:t>
             </a:r>
           </a:p>
           <a:p>
@@ -4119,34 +4114,17 @@
           <a:p/>
           <a:p>
             <a:r>
-              <a:t>华辰资本旗下的 HC Energy Transition Fund 在最近的资产配置会议中</a:t>
-            </a:r>
-          </a:p>
-          <a:p>
-            <a:r>
-              <a:t>讨论了 新能源 行业的投资机会，并对 鸿睿思博网络有限公司</a:t>
-            </a:r>
-          </a:p>
-          <a:p>
-            <a:r>
-              <a:t>进行了重点评估。</a:t>
-            </a:r>
-          </a:p>
-          <a:p/>
-          <a:p/>
-          <a:p>
-            <a:r>
-              <a:t>浦华众城信息有限公司 是中国 云计算 行业的重要企业之一。</a:t>
-            </a:r>
-          </a:p>
-          <a:p>
-            <a:r>
-              <a:t>根据华辰资本 投资策略部 的研究，该公司成立于 2015 年，</a:t>
-            </a:r>
-          </a:p>
-          <a:p>
-            <a:r>
-              <a:t>目前员工规模约 2962 人。公司近年来持续加大研发投入，</a:t>
+              <a:t>联软科技有限公司 是中国 消费科技 行业的重要企业之一。</a:t>
+            </a:r>
+          </a:p>
+          <a:p>
+            <a:r>
+              <a:t>根据华辰资本 量化研究部 的研究，该公司成立于 2009 年，</a:t>
+            </a:r>
+          </a:p>
+          <a:p>
+            <a:r>
+              <a:t>目前员工规模约 7080 人。公司近年来持续加大研发投入，</a:t>
             </a:r>
           </a:p>
           <a:p>
@@ -4158,17 +4136,44 @@
           <a:p/>
           <a:p>
             <a:r>
-              <a:t>根据内部财务模型测算，雨林木风计算机科技有限公司 在未来三年</a:t>
-            </a:r>
-          </a:p>
-          <a:p>
-            <a:r>
-              <a:t>收入复合增长率预计可达到 17% 左右。</a:t>
-            </a:r>
-          </a:p>
-          <a:p>
-            <a:r>
-              <a:t>该预测基于行业需求增长以及公司产能扩张计划。</a:t>
+              <a:t>飞海科技传媒有限公司 是中国 消费科技 行业的重要企业之一。</a:t>
+            </a:r>
+          </a:p>
+          <a:p>
+            <a:r>
+              <a:t>根据华辰资本 投资委员会 的研究，该公司成立于 2016 年，</a:t>
+            </a:r>
+          </a:p>
+          <a:p>
+            <a:r>
+              <a:t>目前员工规模约 2007 人。公司近年来持续加大研发投入，</a:t>
+            </a:r>
+          </a:p>
+          <a:p>
+            <a:r>
+              <a:t>在核心技术方面形成了较强的竞争壁垒。</a:t>
+            </a:r>
+          </a:p>
+          <a:p/>
+          <a:p/>
+          <a:p>
+            <a:r>
+              <a:t>华成育卓传媒有限公司 是中国 人工智能 行业的重要企业之一。</a:t>
+            </a:r>
+          </a:p>
+          <a:p>
+            <a:r>
+              <a:t>根据华辰资本 量化研究部 的研究，该公司成立于 2006 年，</a:t>
+            </a:r>
+          </a:p>
+          <a:p>
+            <a:r>
+              <a:t>目前员工规模约 7579 人。公司近年来持续加大研发投入，</a:t>
+            </a:r>
+          </a:p>
+          <a:p>
+            <a:r>
+              <a:t>在核心技术方面形成了较强的竞争壁垒。</a:t>
             </a:r>
           </a:p>
           <a:p/>
@@ -4230,51 +4235,51 @@
           <a:p/>
           <a:p>
             <a:r>
-              <a:t>华辰资本旗下的 HC Alpha Growth Fund 在最近的资产配置会议中</a:t>
-            </a:r>
-          </a:p>
-          <a:p>
-            <a:r>
-              <a:t>讨论了 云计算 行业的投资机会，并对 易动力科技有限公司</a:t>
+              <a:t>从产业链角度看，人工智能 行业主要由上游设备厂商、</a:t>
+            </a:r>
+          </a:p>
+          <a:p>
+            <a:r>
+              <a:t>中游平台企业以及下游应用厂商组成。</a:t>
+            </a:r>
+          </a:p>
+          <a:p>
+            <a:r>
+              <a:t>飞利信科技有限公司 主要位于产业链的 上游 环节。</a:t>
+            </a:r>
+          </a:p>
+          <a:p/>
+          <a:p/>
+          <a:p>
+            <a:r>
+              <a:t>从产业链角度看，医疗科技 行业主要由上游设备厂商、</a:t>
+            </a:r>
+          </a:p>
+          <a:p>
+            <a:r>
+              <a:t>中游平台企业以及下游应用厂商组成。</a:t>
+            </a:r>
+          </a:p>
+          <a:p>
+            <a:r>
+              <a:t>九方传媒有限公司 主要位于产业链的 上游 环节。</a:t>
+            </a:r>
+          </a:p>
+          <a:p/>
+          <a:p/>
+          <a:p>
+            <a:r>
+              <a:t>华辰资本旗下的 HC Energy Transition Fund 在最近的资产配置会议中</a:t>
+            </a:r>
+          </a:p>
+          <a:p>
+            <a:r>
+              <a:t>讨论了 消费科技 行业的投资机会，并对 联软科技有限公司</a:t>
             </a:r>
           </a:p>
           <a:p>
             <a:r>
               <a:t>进行了重点评估。</a:t>
-            </a:r>
-          </a:p>
-          <a:p/>
-          <a:p/>
-          <a:p>
-            <a:r>
-              <a:t>根据内部财务模型测算，飞利信科技有限公司 在未来三年</a:t>
-            </a:r>
-          </a:p>
-          <a:p>
-            <a:r>
-              <a:t>收入复合增长率预计可达到 34% 左右。</a:t>
-            </a:r>
-          </a:p>
-          <a:p>
-            <a:r>
-              <a:t>该预测基于行业需求增长以及公司产能扩张计划。</a:t>
-            </a:r>
-          </a:p>
-          <a:p/>
-          <a:p/>
-          <a:p>
-            <a:r>
-              <a:t>从产业链角度看，机器人 行业主要由上游设备厂商、</a:t>
-            </a:r>
-          </a:p>
-          <a:p>
-            <a:r>
-              <a:t>中游平台企业以及下游应用厂商组成。</a:t>
-            </a:r>
-          </a:p>
-          <a:p>
-            <a:r>
-              <a:t>济南亿次元网络有限公司 主要位于产业链的 下游 环节。</a:t>
             </a:r>
           </a:p>
           <a:p/>
@@ -4336,7 +4341,24 @@
           <a:p/>
           <a:p>
             <a:r>
-              <a:t>风险管理部认为，云计算 行业仍然面临若干</a:t>
+              <a:t>从产业链角度看，医疗科技 行业主要由上游设备厂商、</a:t>
+            </a:r>
+          </a:p>
+          <a:p>
+            <a:r>
+              <a:t>中游平台企业以及下游应用厂商组成。</a:t>
+            </a:r>
+          </a:p>
+          <a:p>
+            <a:r>
+              <a:t>迪摩信息有限公司 主要位于产业链的 上游 环节。</a:t>
+            </a:r>
+          </a:p>
+          <a:p/>
+          <a:p/>
+          <a:p>
+            <a:r>
+              <a:t>风险管理部认为，消费科技 行业仍然面临若干</a:t>
             </a:r>
           </a:p>
           <a:p>
@@ -4353,29 +4375,12 @@
           <a:p/>
           <a:p>
             <a:r>
-              <a:t>从产业链角度看，半导体 行业主要由上游设备厂商、</a:t>
-            </a:r>
-          </a:p>
-          <a:p>
-            <a:r>
-              <a:t>中游平台企业以及下游应用厂商组成。</a:t>
-            </a:r>
-          </a:p>
-          <a:p>
-            <a:r>
-              <a:t>浦华众城科技有限公司 主要位于产业链的 上游 环节。</a:t>
-            </a:r>
-          </a:p>
-          <a:p/>
-          <a:p/>
-          <a:p>
-            <a:r>
-              <a:t>华辰资本旗下的 HC AI Innovation Fund 在最近的资产配置会议中</a:t>
-            </a:r>
-          </a:p>
-          <a:p>
-            <a:r>
-              <a:t>讨论了 机器人 行业的投资机会，并对 新宇龙信息传媒有限公司</a:t>
+              <a:t>华辰资本旗下的 HC Energy Transition Fund 在最近的资产配置会议中</a:t>
+            </a:r>
+          </a:p>
+          <a:p>
+            <a:r>
+              <a:t>讨论了 人工智能 行业的投资机会，并对 方正科技传媒有限公司</a:t>
             </a:r>
           </a:p>
           <a:p>
@@ -4442,56 +4447,51 @@
           <a:p/>
           <a:p>
             <a:r>
-              <a:t>华辰资本旗下的 HC Energy Transition Fund 在最近的资产配置会议中</a:t>
-            </a:r>
-          </a:p>
-          <a:p>
-            <a:r>
-              <a:t>讨论了 云计算 行业的投资机会，并对 立信电子网络有限公司</a:t>
-            </a:r>
-          </a:p>
-          <a:p>
-            <a:r>
-              <a:t>进行了重点评估。</a:t>
-            </a:r>
-          </a:p>
-          <a:p/>
-          <a:p/>
-          <a:p>
-            <a:r>
-              <a:t>华辰资本旗下的 HC Alpha Growth Fund 在最近的资产配置会议中</a:t>
-            </a:r>
-          </a:p>
-          <a:p>
-            <a:r>
-              <a:t>讨论了 云计算 行业的投资机会，并对 易动力科技有限公司</a:t>
-            </a:r>
-          </a:p>
-          <a:p>
-            <a:r>
-              <a:t>进行了重点评估。</a:t>
-            </a:r>
-          </a:p>
-          <a:p/>
-          <a:p/>
-          <a:p>
-            <a:r>
-              <a:t>九方信息有限公司 是中国 新能源 行业的重要企业之一。</a:t>
-            </a:r>
-          </a:p>
-          <a:p>
-            <a:r>
-              <a:t>根据华辰资本 风险管理部 的研究，该公司成立于 2011 年，</a:t>
-            </a:r>
-          </a:p>
-          <a:p>
-            <a:r>
-              <a:t>目前员工规模约 6198 人。公司近年来持续加大研发投入，</a:t>
-            </a:r>
-          </a:p>
-          <a:p>
-            <a:r>
-              <a:t>在核心技术方面形成了较强的竞争壁垒。</a:t>
+              <a:t>根据内部财务模型测算，天开科技有限公司 在未来三年</a:t>
+            </a:r>
+          </a:p>
+          <a:p>
+            <a:r>
+              <a:t>收入复合增长率预计可达到 22% 左右。</a:t>
+            </a:r>
+          </a:p>
+          <a:p>
+            <a:r>
+              <a:t>该预测基于行业需求增长以及公司产能扩张计划。</a:t>
+            </a:r>
+          </a:p>
+          <a:p/>
+          <a:p/>
+          <a:p>
+            <a:r>
+              <a:t>从产业链角度看，机器人 行业主要由上游设备厂商、</a:t>
+            </a:r>
+          </a:p>
+          <a:p>
+            <a:r>
+              <a:t>中游平台企业以及下游应用厂商组成。</a:t>
+            </a:r>
+          </a:p>
+          <a:p>
+            <a:r>
+              <a:t>图龙信息传媒有限公司 主要位于产业链的 上游 环节。</a:t>
+            </a:r>
+          </a:p>
+          <a:p/>
+          <a:p/>
+          <a:p>
+            <a:r>
+              <a:t>根据内部财务模型测算，创联世纪信息有限公司 在未来三年</a:t>
+            </a:r>
+          </a:p>
+          <a:p>
+            <a:r>
+              <a:t>收入复合增长率预计可达到 20% 左右。</a:t>
+            </a:r>
+          </a:p>
+          <a:p>
+            <a:r>
+              <a:t>该预测基于行业需求增长以及公司产能扩张计划。</a:t>
             </a:r>
           </a:p>
           <a:p/>
@@ -4553,56 +4553,51 @@
           <a:p/>
           <a:p>
             <a:r>
-              <a:t>华辰资本旗下的 HC Alpha Growth Fund 在最近的资产配置会议中</a:t>
-            </a:r>
-          </a:p>
-          <a:p>
-            <a:r>
-              <a:t>讨论了 人工智能 行业的投资机会，并对 信诚致远传媒有限公司</a:t>
-            </a:r>
-          </a:p>
-          <a:p>
-            <a:r>
-              <a:t>进行了重点评估。</a:t>
-            </a:r>
-          </a:p>
-          <a:p/>
-          <a:p/>
-          <a:p>
-            <a:r>
-              <a:t>浦华众城科技有限公司 是中国 半导体 行业的重要企业之一。</a:t>
-            </a:r>
-          </a:p>
-          <a:p>
-            <a:r>
-              <a:t>根据华辰资本 量化研究部 的研究，该公司成立于 2015 年，</a:t>
-            </a:r>
-          </a:p>
-          <a:p>
-            <a:r>
-              <a:t>目前员工规模约 273 人。公司近年来持续加大研发投入，</a:t>
-            </a:r>
-          </a:p>
-          <a:p>
-            <a:r>
-              <a:t>在核心技术方面形成了较强的竞争壁垒。</a:t>
-            </a:r>
-          </a:p>
-          <a:p/>
-          <a:p/>
-          <a:p>
-            <a:r>
-              <a:t>根据内部财务模型测算，雨林木风计算机网络有限公司 在未来三年</a:t>
-            </a:r>
-          </a:p>
-          <a:p>
-            <a:r>
-              <a:t>收入复合增长率预计可达到 35% 左右。</a:t>
-            </a:r>
-          </a:p>
-          <a:p>
-            <a:r>
-              <a:t>该预测基于行业需求增长以及公司产能扩张计划。</a:t>
+              <a:t>风险管理部认为，半导体 行业仍然面临若干</a:t>
+            </a:r>
+          </a:p>
+          <a:p>
+            <a:r>
+              <a:t>不确定性因素，包括技术迭代风险、政策变化、</a:t>
+            </a:r>
+          </a:p>
+          <a:p>
+            <a:r>
+              <a:t>以及市场竞争加剧等问题。</a:t>
+            </a:r>
+          </a:p>
+          <a:p/>
+          <a:p/>
+          <a:p>
+            <a:r>
+              <a:t>风险管理部认为，云计算 行业仍然面临若干</a:t>
+            </a:r>
+          </a:p>
+          <a:p>
+            <a:r>
+              <a:t>不确定性因素，包括技术迭代风险、政策变化、</a:t>
+            </a:r>
+          </a:p>
+          <a:p>
+            <a:r>
+              <a:t>以及市场竞争加剧等问题。</a:t>
+            </a:r>
+          </a:p>
+          <a:p/>
+          <a:p/>
+          <a:p>
+            <a:r>
+              <a:t>从产业链角度看，云计算 行业主要由上游设备厂商、</a:t>
+            </a:r>
+          </a:p>
+          <a:p>
+            <a:r>
+              <a:t>中游平台企业以及下游应用厂商组成。</a:t>
+            </a:r>
+          </a:p>
+          <a:p>
+            <a:r>
+              <a:t>泰麒麟网络有限公司 主要位于产业链的 下游 环节。</a:t>
             </a:r>
           </a:p>
           <a:p/>
@@ -4664,51 +4659,51 @@
           <a:p/>
           <a:p>
             <a:r>
-              <a:t>根据内部财务模型测算，国讯网络有限公司 在未来三年</a:t>
-            </a:r>
-          </a:p>
-          <a:p>
-            <a:r>
-              <a:t>收入复合增长率预计可达到 21% 左右。</a:t>
+              <a:t>风险管理部认为，消费科技 行业仍然面临若干</a:t>
+            </a:r>
+          </a:p>
+          <a:p>
+            <a:r>
+              <a:t>不确定性因素，包括技术迭代风险、政策变化、</a:t>
+            </a:r>
+          </a:p>
+          <a:p>
+            <a:r>
+              <a:t>以及市场竞争加剧等问题。</a:t>
+            </a:r>
+          </a:p>
+          <a:p/>
+          <a:p/>
+          <a:p>
+            <a:r>
+              <a:t>从产业链角度看，云计算 行业主要由上游设备厂商、</a:t>
+            </a:r>
+          </a:p>
+          <a:p>
+            <a:r>
+              <a:t>中游平台企业以及下游应用厂商组成。</a:t>
+            </a:r>
+          </a:p>
+          <a:p>
+            <a:r>
+              <a:t>信诚致远科技有限公司 主要位于产业链的 下游 环节。</a:t>
+            </a:r>
+          </a:p>
+          <a:p/>
+          <a:p/>
+          <a:p>
+            <a:r>
+              <a:t>根据内部财务模型测算，新格林耐特网络有限公司 在未来三年</a:t>
+            </a:r>
+          </a:p>
+          <a:p>
+            <a:r>
+              <a:t>收入复合增长率预计可达到 32% 左右。</a:t>
             </a:r>
           </a:p>
           <a:p>
             <a:r>
               <a:t>该预测基于行业需求增长以及公司产能扩张计划。</a:t>
-            </a:r>
-          </a:p>
-          <a:p/>
-          <a:p/>
-          <a:p>
-            <a:r>
-              <a:t>风险管理部认为，新能源 行业仍然面临若干</a:t>
-            </a:r>
-          </a:p>
-          <a:p>
-            <a:r>
-              <a:t>不确定性因素，包括技术迭代风险、政策变化、</a:t>
-            </a:r>
-          </a:p>
-          <a:p>
-            <a:r>
-              <a:t>以及市场竞争加剧等问题。</a:t>
-            </a:r>
-          </a:p>
-          <a:p/>
-          <a:p/>
-          <a:p>
-            <a:r>
-              <a:t>风险管理部认为，半导体 行业仍然面临若干</a:t>
-            </a:r>
-          </a:p>
-          <a:p>
-            <a:r>
-              <a:t>不确定性因素，包括技术迭代风险、政策变化、</a:t>
-            </a:r>
-          </a:p>
-          <a:p>
-            <a:r>
-              <a:t>以及市场竞争加剧等问题。</a:t>
             </a:r>
           </a:p>
           <a:p/>
